--- a/P8.pptx
+++ b/P8.pptx
@@ -6350,9 +6350,6 @@
             <a:endParaRPr lang="en-GB" dirty="0"/>
           </a:p>
           <a:p>
-            <a:endParaRPr lang="en-GB" dirty="0"/>
-          </a:p>
-          <a:p>
             <a:r>
               <a:rPr lang="en-GB" dirty="0">
                 <a:hlinkClick r:id="rId3"/>
@@ -6362,6 +6359,24 @@
             <a:endParaRPr lang="en-GB" dirty="0"/>
           </a:p>
           <a:p>
+            <a:r>
+              <a:rPr lang="fr-FR" dirty="0">
+                <a:hlinkClick r:id="rId4"/>
+              </a:rPr>
+              <a:t>Bright381/</a:t>
+            </a:r>
+            <a:r>
+              <a:rPr lang="fr-FR" dirty="0" err="1">
+                <a:hlinkClick r:id="rId4"/>
+              </a:rPr>
+              <a:t>scoring</a:t>
+            </a:r>
+            <a:r>
+              <a:rPr lang="fr-FR" dirty="0">
+                <a:hlinkClick r:id="rId4"/>
+              </a:rPr>
+              <a:t>-api</a:t>
+            </a:r>
             <a:endParaRPr lang="en-GB" dirty="0"/>
           </a:p>
           <a:p>
@@ -6387,7 +6402,7 @@
           <p:nvPr/>
         </p:nvPicPr>
         <p:blipFill>
-          <a:blip r:embed="rId4"/>
+          <a:blip r:embed="rId5"/>
           <a:stretch>
             <a:fillRect/>
           </a:stretch>
@@ -6417,7 +6432,7 @@
           <p:nvPr/>
         </p:nvPicPr>
         <p:blipFill>
-          <a:blip r:embed="rId5"/>
+          <a:blip r:embed="rId6"/>
           <a:stretch>
             <a:fillRect/>
           </a:stretch>
@@ -6447,7 +6462,7 @@
           <p:nvPr/>
         </p:nvPicPr>
         <p:blipFill>
-          <a:blip r:embed="rId6"/>
+          <a:blip r:embed="rId7"/>
           <a:stretch>
             <a:fillRect/>
           </a:stretch>
